--- a/examples/hello-table/fixtures/deck.libreoffice-edited.pptx
+++ b/examples/hello-table/fixtures/deck.libreoffice-edited.pptx
@@ -8697,7 +8697,7 @@
       </p:grpSpPr>
       <p:sp>
         <p:nvSpPr>
-          <p:cNvPr id="73" name="ox:79cf7543-79e8-551e-992b-1899612ea818"/>
+          <p:cNvPr id="73" name="mleaf:79cf7543-79e8-551e-992b-1899612ea818"/>
           <p:cNvSpPr/>
           <p:nvPr/>
         </p:nvSpPr>
@@ -8750,7 +8750,7 @@
       </p:sp>
       <p:sp>
         <p:nvSpPr>
-          <p:cNvPr id="74" name="ox:b73a0317-a900-5035-8af5-41d456a76424"/>
+          <p:cNvPr id="74" name="mleaf:b73a0317-a900-5035-8af5-41d456a76424"/>
           <p:cNvSpPr/>
           <p:nvPr/>
         </p:nvSpPr>
@@ -8840,7 +8840,7 @@
       </p:grpSpPr>
       <p:sp>
         <p:nvSpPr>
-          <p:cNvPr id="75" name="ox:9b9cc37c-57d8-5294-896e-305ec1757883"/>
+          <p:cNvPr id="75" name="mleaf:9b9cc37c-57d8-5294-896e-305ec1757883"/>
           <p:cNvSpPr/>
           <p:nvPr/>
         </p:nvSpPr>
@@ -8893,7 +8893,7 @@
       </p:sp>
       <p:graphicFrame>
         <p:nvGraphicFramePr>
-          <p:cNvPr id="76" name="ox:987b7602-b694-53d2-b390-57f9d8ca3870"/>
+          <p:cNvPr id="76" name="mleaf:987b7602-b694-53d2-b390-57f9d8ca3870"/>
           <p:cNvGraphicFramePr/>
           <p:nvPr/>
         </p:nvGraphicFramePr>
@@ -9387,7 +9387,7 @@
       </p:graphicFrame>
       <p:graphicFrame>
         <p:nvGraphicFramePr>
-          <p:cNvPr id="77" name="ox:23ddaa1c-1c51-5324-8860-64ed833aa77f"/>
+          <p:cNvPr id="77" name="mleaf:23ddaa1c-1c51-5324-8860-64ed833aa77f"/>
           <p:cNvGraphicFramePr/>
           <p:nvPr/>
         </p:nvGraphicFramePr>
@@ -9403,7 +9403,7 @@
       </p:graphicFrame>
       <p:sp>
         <p:nvSpPr>
-          <p:cNvPr id="78" name="ox:1f3d316c-9724-5069-b314-93f167a63dbb"/>
+          <p:cNvPr id="78" name="mleaf:1f3d316c-9724-5069-b314-93f167a63dbb"/>
           <p:cNvSpPr/>
           <p:nvPr/>
         </p:nvSpPr>
@@ -9511,7 +9511,7 @@
       </p:grpSpPr>
       <p:sp>
         <p:nvSpPr>
-          <p:cNvPr id="79" name="ox:5b80e2c4-11e9-59eb-ba28-26372e59d240"/>
+          <p:cNvPr id="79" name="mleaf:5b80e2c4-11e9-59eb-ba28-26372e59d240"/>
           <p:cNvSpPr/>
           <p:nvPr/>
         </p:nvSpPr>
@@ -9564,7 +9564,7 @@
       </p:sp>
       <p:sp>
         <p:nvSpPr>
-          <p:cNvPr id="80" name="ox:fe7234e8-6154-5a93-9672-691664c55a4c"/>
+          <p:cNvPr id="80" name="mleaf:fe7234e8-6154-5a93-9672-691664c55a4c"/>
           <p:cNvSpPr/>
           <p:nvPr/>
         </p:nvSpPr>
@@ -9712,7 +9712,7 @@
       </p:sp>
       <p:pic>
         <p:nvPicPr>
-          <p:cNvPr id="81" name="ox:3dd13f43-6346-534e-a04d-fb73fa6e8967" descr=""/>
+          <p:cNvPr id="81" name="mleaf:3dd13f43-6346-534e-a04d-fb73fa6e8967" descr=""/>
           <p:cNvPicPr/>
           <p:nvPr/>
         </p:nvPicPr>

--- a/examples/hello-table/fixtures/deck.libreoffice-edited.pptx
+++ b/examples/hello-table/fixtures/deck.libreoffice-edited.pptx
@@ -161,11 +161,11 @@
         </c:ser>
         <c:gapWidth val="219"/>
         <c:overlap val="-27"/>
-        <c:axId val="34423833"/>
-        <c:axId val="87998422"/>
+        <c:axId val="77764190"/>
+        <c:axId val="83852940"/>
       </c:barChart>
       <c:catAx>
-        <c:axId val="34423833"/>
+        <c:axId val="77764190"/>
         <c:scaling>
           <c:orientation val="minMax"/>
         </c:scaling>
@@ -197,7 +197,7 @@
             </a:pPr>
           </a:p>
         </c:txPr>
-        <c:crossAx val="87998422"/>
+        <c:crossAx val="83852940"/>
         <c:crosses val="autoZero"/>
         <c:auto val="1"/>
         <c:lblAlgn val="ctr"/>
@@ -205,7 +205,7 @@
         <c:noMultiLvlLbl val="0"/>
       </c:catAx>
       <c:valAx>
-        <c:axId val="87998422"/>
+        <c:axId val="83852940"/>
         <c:scaling>
           <c:orientation val="minMax"/>
         </c:scaling>
@@ -247,7 +247,7 @@
             </a:pPr>
           </a:p>
         </c:txPr>
-        <c:crossAx val="34423833"/>
+        <c:crossAx val="77764190"/>
         <c:crosses val="autoZero"/>
         <c:crossBetween val="between"/>
       </c:valAx>
@@ -617,7 +617,7 @@
             <a:pPr indent="0" algn="r">
               <a:buNone/>
             </a:pPr>
-            <a:fld id="{515BE534-0055-4D17-B5C7-BC38E707F89F}" type="slidenum">
+            <a:fld id="{62942804-7026-498A-8647-997C033ADE21}" type="slidenum">
               <a:rPr b="0" lang="en-US" sz="1400" spc="-1" strike="noStrike">
                 <a:solidFill>
                   <a:srgbClr val="000000"/>
@@ -869,7 +869,7 @@
         <p:txBody>
           <a:bodyPr/>
           <a:p>
-            <a:fld id="{9A85874A-7236-4B50-B541-2C8E82692F4B}" type="slidenum">
+            <a:fld id="{05999897-296E-47DC-AC49-F30922F62942}" type="slidenum">
               <a:t>&lt;#&gt;</a:t>
             </a:fld>
           </a:p>
@@ -952,7 +952,7 @@
         <p:txBody>
           <a:bodyPr/>
           <a:p>
-            <a:fld id="{862EDFBF-5251-486F-82C3-D957722FC523}" type="slidenum">
+            <a:fld id="{478F7A05-EAE4-4EFD-B4A9-86C2DA72691E}" type="slidenum">
               <a:t>&lt;#&gt;</a:t>
             </a:fld>
           </a:p>
@@ -1035,7 +1035,7 @@
         <p:txBody>
           <a:bodyPr/>
           <a:p>
-            <a:fld id="{6A3F1085-6BD1-46A7-9AA6-639252BD70C5}" type="slidenum">
+            <a:fld id="{25C90BD3-AE0D-49FE-998F-B0A2EC001E90}" type="slidenum">
               <a:t>&lt;#&gt;</a:t>
             </a:fld>
           </a:p>
@@ -1118,7 +1118,7 @@
         <p:txBody>
           <a:bodyPr/>
           <a:p>
-            <a:fld id="{2125CEA1-A703-4A0C-B21D-7C3B76AFB6EB}" type="slidenum">
+            <a:fld id="{B5CD93D8-8180-49E9-A60C-9CC408EE1DE8}" type="slidenum">
               <a:t>&lt;#&gt;</a:t>
             </a:fld>
           </a:p>
@@ -1201,7 +1201,7 @@
         <p:txBody>
           <a:bodyPr/>
           <a:p>
-            <a:fld id="{75B4EF0A-4560-46C5-8242-4CBFEF4A7740}" type="slidenum">
+            <a:fld id="{C8ABC45C-8B2A-4D56-B702-B9B7C72DAE3E}" type="slidenum">
               <a:t>&lt;#&gt;</a:t>
             </a:fld>
           </a:p>
@@ -1370,7 +1370,7 @@
         <p:txBody>
           <a:bodyPr/>
           <a:p>
-            <a:fld id="{C77FA5C7-66B1-4ABD-A5DF-729DB1661E78}" type="slidenum">
+            <a:fld id="{0ADEA61B-F8C4-4619-8549-44E8B5C639AE}" type="slidenum">
               <a:t>&lt;#&gt;</a:t>
             </a:fld>
           </a:p>
@@ -1453,7 +1453,7 @@
         <p:txBody>
           <a:bodyPr/>
           <a:p>
-            <a:fld id="{D9F18F7C-111A-46CA-956B-F2B94FF2E5DD}" type="slidenum">
+            <a:fld id="{E863AD0E-2029-476F-9757-6A43DC68A107}" type="slidenum">
               <a:t>&lt;#&gt;</a:t>
             </a:fld>
           </a:p>
@@ -1668,7 +1668,7 @@
         <p:txBody>
           <a:bodyPr/>
           <a:p>
-            <a:fld id="{5F7915D9-6EFC-4D89-B11D-01FF9D857DBA}" type="slidenum">
+            <a:fld id="{3EA1A587-11C8-4039-A1A5-411E87799D7D}" type="slidenum">
               <a:t>&lt;#&gt;</a:t>
             </a:fld>
           </a:p>
@@ -1751,7 +1751,7 @@
         <p:txBody>
           <a:bodyPr/>
           <a:p>
-            <a:fld id="{C00EE193-7494-433C-BD74-4F905F9B8D18}" type="slidenum">
+            <a:fld id="{284E75FA-AE0A-41DD-8BEE-D7696E4A8508}" type="slidenum">
               <a:t>&lt;#&gt;</a:t>
             </a:fld>
           </a:p>
@@ -1874,7 +1874,7 @@
         <p:txBody>
           <a:bodyPr/>
           <a:p>
-            <a:fld id="{D11A6C37-0274-4982-A80E-23FA3910B81D}" type="slidenum">
+            <a:fld id="{3596B41F-FE22-4F72-8C72-16F87AF1F516}" type="slidenum">
               <a:t>&lt;#&gt;</a:t>
             </a:fld>
           </a:p>
@@ -1957,7 +1957,7 @@
         <p:txBody>
           <a:bodyPr/>
           <a:p>
-            <a:fld id="{0B188C08-649B-4D8E-B34E-E429DCDC2AF6}" type="slidenum">
+            <a:fld id="{AAC05362-800D-4201-B863-3890EB144DA7}" type="slidenum">
               <a:t>&lt;#&gt;</a:t>
             </a:fld>
           </a:p>
@@ -2232,7 +2232,7 @@
               </a:lnSpc>
               <a:buNone/>
             </a:pPr>
-            <a:fld id="{9C8C7141-5B85-4C32-8DD8-61A4ED24BA8F}" type="slidenum">
+            <a:fld id="{BFFC9A09-F17B-4FDF-BA8D-BA0B9553A078}" type="slidenum">
               <a:rPr b="0" lang="en-US" sz="1200" spc="-1" strike="noStrike">
                 <a:solidFill>
                   <a:schemeClr val="dk1">
@@ -2996,7 +2996,7 @@
               </a:lnSpc>
               <a:buNone/>
             </a:pPr>
-            <a:fld id="{D4E60F1D-52BC-4752-B88F-E5CE967E3F0C}" type="slidenum">
+            <a:fld id="{A357EEDE-9B40-4F70-96E4-A01A8E8809B8}" type="slidenum">
               <a:rPr b="0" lang="en-US" sz="1200" spc="-1" strike="noStrike">
                 <a:solidFill>
                   <a:schemeClr val="dk1">
@@ -3760,7 +3760,7 @@
               </a:lnSpc>
               <a:buNone/>
             </a:pPr>
-            <a:fld id="{5F2A96D9-9222-487C-AC7C-60858EB68EB1}" type="slidenum">
+            <a:fld id="{AAEA7289-540C-4747-A52B-36DCCEFA4B28}" type="slidenum">
               <a:rPr b="0" lang="en-US" sz="1200" spc="-1" strike="noStrike">
                 <a:solidFill>
                   <a:schemeClr val="dk1">
@@ -4278,7 +4278,7 @@
               </a:lnSpc>
               <a:buNone/>
             </a:pPr>
-            <a:fld id="{12004C06-132E-4F14-8DB7-C00C83E437A7}" type="slidenum">
+            <a:fld id="{34AB615A-5AF6-4ACE-A03D-DDAF78340C4E}" type="slidenum">
               <a:rPr b="0" lang="en-US" sz="1200" spc="-1" strike="noStrike">
                 <a:solidFill>
                   <a:schemeClr val="dk1">
@@ -4796,7 +4796,7 @@
               </a:lnSpc>
               <a:buNone/>
             </a:pPr>
-            <a:fld id="{C3B1E761-F691-4477-A0E4-41F812BBC226}" type="slidenum">
+            <a:fld id="{5A65F90C-BEC5-44CC-970F-B14C4CF3298B}" type="slidenum">
               <a:rPr b="0" lang="en-US" sz="1200" spc="-1" strike="noStrike">
                 <a:solidFill>
                   <a:schemeClr val="dk1">
@@ -5314,7 +5314,7 @@
               </a:lnSpc>
               <a:buNone/>
             </a:pPr>
-            <a:fld id="{F353496A-BB04-49F9-AE46-DC336ED1E2D1}" type="slidenum">
+            <a:fld id="{106E288C-63E1-4B9D-88C2-9927FD8A7BC0}" type="slidenum">
               <a:rPr b="0" lang="en-US" sz="1200" spc="-1" strike="noStrike">
                 <a:solidFill>
                   <a:schemeClr val="dk1">
@@ -5832,7 +5832,7 @@
               </a:lnSpc>
               <a:buNone/>
             </a:pPr>
-            <a:fld id="{74DB6661-5047-470E-B488-1F3847718867}" type="slidenum">
+            <a:fld id="{34CE4008-7789-4B37-9954-A2D0285FFF83}" type="slidenum">
               <a:rPr b="0" lang="en-US" sz="1200" spc="-1" strike="noStrike">
                 <a:solidFill>
                   <a:schemeClr val="dk1">
@@ -5959,7 +5959,7 @@
         </p:spPr>
         <p:txBody>
           <a:bodyPr lIns="90000" rIns="90000" tIns="45000" bIns="45000" anchor="t">
-            <a:normAutofit fontScale="93550"/>
+            <a:normAutofit/>
           </a:bodyPr>
           <a:p>
             <a:pPr marL="432000" indent="-324000">
@@ -6205,7 +6205,7 @@
         </p:spPr>
         <p:txBody>
           <a:bodyPr lIns="90000" rIns="90000" tIns="45000" bIns="45000" anchor="t">
-            <a:normAutofit fontScale="93550"/>
+            <a:normAutofit/>
           </a:bodyPr>
           <a:p>
             <a:pPr marL="432000" indent="-324000">
@@ -6596,7 +6596,7 @@
               </a:lnSpc>
               <a:buNone/>
             </a:pPr>
-            <a:fld id="{BE514DB5-8A46-44CD-895D-2E3E219F6130}" type="slidenum">
+            <a:fld id="{FF49039B-31D0-45C2-82AC-540C26E607B2}" type="slidenum">
               <a:rPr b="0" lang="en-US" sz="1200" spc="-1" strike="noStrike">
                 <a:solidFill>
                   <a:schemeClr val="dk1">
@@ -6969,7 +6969,7 @@
         </p:spPr>
         <p:txBody>
           <a:bodyPr lIns="90000" rIns="90000" tIns="45000" bIns="45000" anchor="t">
-            <a:normAutofit fontScale="81053"/>
+            <a:normAutofit fontScale="87480" lnSpcReduction="10000"/>
           </a:bodyPr>
           <a:p>
             <a:pPr marL="432000" indent="-324000">
@@ -7461,7 +7461,7 @@
         </p:spPr>
         <p:txBody>
           <a:bodyPr lIns="90000" rIns="90000" tIns="45000" bIns="45000" anchor="t">
-            <a:normAutofit fontScale="81053"/>
+            <a:normAutofit fontScale="87480" lnSpcReduction="10000"/>
           </a:bodyPr>
           <a:p>
             <a:pPr marL="432000" indent="-324000">
@@ -7852,7 +7852,7 @@
               </a:lnSpc>
               <a:buNone/>
             </a:pPr>
-            <a:fld id="{FFA76B7B-451C-47FA-98E8-5AD1C8FC8E3B}" type="slidenum">
+            <a:fld id="{07F35619-28D9-457F-9DCF-34976631CB06}" type="slidenum">
               <a:rPr b="0" lang="en-US" sz="1200" spc="-1" strike="noStrike">
                 <a:solidFill>
                   <a:schemeClr val="dk1">
@@ -8124,7 +8124,7 @@
               </a:lnSpc>
               <a:buNone/>
             </a:pPr>
-            <a:fld id="{D521B0B4-A424-4229-99F3-55764B8DBEAD}" type="slidenum">
+            <a:fld id="{7E9F5CC5-F8B4-44DE-A9E1-8D0564BB79FA}" type="slidenum">
               <a:rPr b="0" lang="en-US" sz="1200" spc="-1" strike="noStrike">
                 <a:solidFill>
                   <a:schemeClr val="dk1">
@@ -8347,7 +8347,7 @@
               </a:lnSpc>
               <a:buNone/>
             </a:pPr>
-            <a:fld id="{957BB02C-1EAC-4BB3-A59C-1692A3B15719}" type="slidenum">
+            <a:fld id="{68892334-700E-4549-A673-BE9119C2AC71}" type="slidenum">
               <a:rPr b="0" lang="en-US" sz="1200" spc="-1" strike="noStrike">
                 <a:solidFill>
                   <a:schemeClr val="dk1">
